--- a/slides/ai-analytics-skills-workshop.pptx
+++ b/slides/ai-analytics-skills-workshop.pptx
@@ -4554,12 +4554,12 @@
         </p:nvSpPr>
         <p:spPr>
           <a:xfrm>
-            <a:off x="548640" y="3236976"/>
-            <a:ext cx="8138160" cy="1005840"/>
+            <a:off x="548640" y="3218688"/>
+            <a:ext cx="8138160" cy="1325880"/>
           </a:xfrm>
           <a:prstGeom prst="roundRect">
             <a:avLst>
-              <a:gd name="adj" fmla="val 7273"/>
+              <a:gd name="adj" fmla="val 5517"/>
             </a:avLst>
           </a:prstGeom>
           <a:solidFill>
@@ -4583,7 +4583,7 @@
         </p:nvSpPr>
         <p:spPr>
           <a:xfrm>
-            <a:off x="804672" y="3383280"/>
+            <a:off x="804672" y="3364992"/>
             <a:ext cx="7626096" cy="274320"/>
           </a:xfrm>
           <a:prstGeom prst="rect">
@@ -4622,8 +4622,8 @@
         </p:nvSpPr>
         <p:spPr>
           <a:xfrm>
-            <a:off x="804672" y="3749040"/>
-            <a:ext cx="7626096" cy="329184"/>
+            <a:off x="804672" y="3730752"/>
+            <a:ext cx="7626096" cy="649224"/>
           </a:xfrm>
           <a:prstGeom prst="rect">
             <a:avLst/>
@@ -5753,7 +5753,7 @@
         <p:spPr>
           <a:xfrm>
             <a:off x="4178808" y="3840480"/>
-            <a:ext cx="1805940" cy="347472"/>
+            <a:ext cx="1874520" cy="347472"/>
           </a:xfrm>
           <a:prstGeom prst="roundRect">
             <a:avLst>
@@ -5780,7 +5780,7 @@
         <p:spPr>
           <a:xfrm>
             <a:off x="4178808" y="3840480"/>
-            <a:ext cx="1805940" cy="347472"/>
+            <a:ext cx="1874520" cy="347472"/>
           </a:xfrm>
           <a:prstGeom prst="rect">
             <a:avLst/>
@@ -5804,7 +5804,7 @@
                 <a:ea typeface="Arial" pitchFamily="34" charset="-122"/>
                 <a:cs typeface="Arial" pitchFamily="34" charset="-120"/>
               </a:rPr>
-              <a:t>Tool / catalog access</a:t>
+              <a:t>Catalog access via MCP</a:t>
             </a:r>
             <a:endParaRPr lang="en-US" sz="1050" dirty="0"/>
           </a:p>
@@ -5818,8 +5818,8 @@
         </p:nvSpPr>
         <p:spPr>
           <a:xfrm>
-            <a:off x="6131052" y="3840480"/>
-            <a:ext cx="2080260" cy="347472"/>
+            <a:off x="6199632" y="3840480"/>
+            <a:ext cx="1737360" cy="347472"/>
           </a:xfrm>
           <a:prstGeom prst="roundRect">
             <a:avLst>
@@ -5845,8 +5845,8 @@
         </p:nvSpPr>
         <p:spPr>
           <a:xfrm>
-            <a:off x="6131052" y="3840480"/>
-            <a:ext cx="2080260" cy="347472"/>
+            <a:off x="6199632" y="3840480"/>
+            <a:ext cx="1737360" cy="347472"/>
           </a:xfrm>
           <a:prstGeom prst="rect">
             <a:avLst/>
@@ -5870,73 +5870,7 @@
                 <a:ea typeface="Arial" pitchFamily="34" charset="-122"/>
                 <a:cs typeface="Arial" pitchFamily="34" charset="-120"/>
               </a:rPr>
-              <a:t>Evidence-backed artifacts</a:t>
-            </a:r>
-            <a:endParaRPr lang="en-US" sz="1050" dirty="0"/>
-          </a:p>
-        </p:txBody>
-      </p:sp>
-      <p:sp>
-        <p:nvSpPr>
-          <p:cNvPr id="20" name="Shape 18"/>
-          <p:cNvSpPr/>
-          <p:nvPr/>
-        </p:nvSpPr>
-        <p:spPr>
-          <a:xfrm>
-            <a:off x="548640" y="4297680"/>
-            <a:ext cx="1531620" cy="347472"/>
-          </a:xfrm>
-          <a:prstGeom prst="roundRect">
-            <a:avLst>
-              <a:gd name="adj" fmla="val 50000"/>
-            </a:avLst>
-          </a:prstGeom>
-          <a:solidFill>
-            <a:srgbClr val="E7F2F4"/>
-          </a:solidFill>
-          <a:ln w="12700">
-            <a:solidFill>
-              <a:srgbClr val="0E7490"/>
-            </a:solidFill>
-            <a:prstDash val="solid"/>
-          </a:ln>
-        </p:spPr>
-      </p:sp>
-      <p:sp>
-        <p:nvSpPr>
-          <p:cNvPr id="21" name="Text 19"/>
-          <p:cNvSpPr/>
-          <p:nvPr/>
-        </p:nvSpPr>
-        <p:spPr>
-          <a:xfrm>
-            <a:off x="548640" y="4297680"/>
-            <a:ext cx="1531620" cy="347472"/>
-          </a:xfrm>
-          <a:prstGeom prst="rect">
-            <a:avLst/>
-          </a:prstGeom>
-          <a:noFill/>
-          <a:ln/>
-        </p:spPr>
-        <p:txBody>
-          <a:bodyPr wrap="square" lIns="0" tIns="0" rIns="0" bIns="0" rtlCol="0" anchor="ctr"/>
-          <a:lstStyle/>
-          <a:p>
-            <a:pPr algn="ctr" indent="0" marL="0">
-              <a:buNone/>
-            </a:pPr>
-            <a:r>
-              <a:rPr lang="en-US" sz="1050" b="1" dirty="0">
-                <a:solidFill>
-                  <a:srgbClr val="0E7490"/>
-                </a:solidFill>
-                <a:latin typeface="Arial" pitchFamily="34" charset="0"/>
-                <a:ea typeface="Arial" pitchFamily="34" charset="-122"/>
-                <a:cs typeface="Arial" pitchFamily="34" charset="-120"/>
-              </a:rPr>
-              <a:t>Reviewable output</a:t>
+              <a:t>Reviewable artifacts</a:t>
             </a:r>
             <a:endParaRPr lang="en-US" sz="1050" dirty="0"/>
           </a:p>
@@ -7012,7 +6946,7 @@
                 <a:ea typeface="Arial" pitchFamily="34" charset="-122"/>
                 <a:cs typeface="Arial" pitchFamily="34" charset="-120"/>
               </a:rPr>
-              <a:t>Open context   →   ask with constraints   →   inspect evidence</a:t>
+              <a:t>Open context   →   ask with constraints   →   inspect evidence   →</a:t>
             </a:r>
             <a:endParaRPr lang="en-US" sz="1600" dirty="0"/>
           </a:p>
@@ -7032,7 +6966,7 @@
                 <a:ea typeface="Arial" pitchFamily="34" charset="-122"/>
                 <a:cs typeface="Arial" pitchFamily="34" charset="-120"/>
               </a:rPr>
-              <a:t>→   propose a change or artifact   →   validate   →   communicate caveats</a:t>
+              <a:t>propose a change or artifact   →   validate   →   communicate caveats</a:t>
             </a:r>
             <a:endParaRPr lang="en-US" sz="1600" dirty="0"/>
           </a:p>
